--- a/ppt.pptx
+++ b/ppt.pptx
@@ -626,7 +626,7 @@
           </a:ln>
           <a:extLst>
             <a:ext uri="{C572A759-6A51-4108-AA02-DFA0A04FC94B}">
-              <ma14:wrappingTextBoxFlag xmlns:ma14="http://schemas.microsoft.com/office/mac/drawingml/2011/main" xmlns:a14="http://schemas.microsoft.com/office/drawing/2010/main" xmlns:m="http://schemas.openxmlformats.org/officeDocument/2006/math" xmlns="" val="1"/>
+              <ma14:wrappingTextBoxFlag xmlns="" xmlns:m="http://schemas.openxmlformats.org/officeDocument/2006/math" xmlns:a14="http://schemas.microsoft.com/office/drawing/2010/main" xmlns:ma14="http://schemas.microsoft.com/office/mac/drawingml/2011/main" val="1"/>
             </a:ext>
           </a:extLst>
         </p:spPr>
@@ -663,7 +663,7 @@
           </a:ln>
           <a:extLst>
             <a:ext uri="{C572A759-6A51-4108-AA02-DFA0A04FC94B}">
-              <ma14:wrappingTextBoxFlag xmlns:ma14="http://schemas.microsoft.com/office/mac/drawingml/2011/main" xmlns:a14="http://schemas.microsoft.com/office/drawing/2010/main" xmlns:m="http://schemas.openxmlformats.org/officeDocument/2006/math" xmlns="" val="1"/>
+              <ma14:wrappingTextBoxFlag xmlns="" xmlns:m="http://schemas.openxmlformats.org/officeDocument/2006/math" xmlns:a14="http://schemas.microsoft.com/office/drawing/2010/main" xmlns:ma14="http://schemas.microsoft.com/office/mac/drawingml/2011/main" val="1"/>
             </a:ext>
           </a:extLst>
         </p:spPr>
@@ -1495,7 +1495,7 @@
           </a:ln>
           <a:extLst>
             <a:ext uri="{C572A759-6A51-4108-AA02-DFA0A04FC94B}">
-              <ma14:wrappingTextBoxFlag xmlns:ma14="http://schemas.microsoft.com/office/mac/drawingml/2011/main" xmlns:a14="http://schemas.microsoft.com/office/drawing/2010/main" xmlns:m="http://schemas.openxmlformats.org/officeDocument/2006/math" xmlns="" val="1"/>
+              <ma14:wrappingTextBoxFlag xmlns="" xmlns:m="http://schemas.openxmlformats.org/officeDocument/2006/math" xmlns:a14="http://schemas.microsoft.com/office/drawing/2010/main" xmlns:ma14="http://schemas.microsoft.com/office/mac/drawingml/2011/main" val="1"/>
             </a:ext>
           </a:extLst>
         </p:spPr>
@@ -1541,7 +1541,7 @@
           </a:ln>
           <a:extLst>
             <a:ext uri="{C572A759-6A51-4108-AA02-DFA0A04FC94B}">
-              <ma14:wrappingTextBoxFlag xmlns:ma14="http://schemas.microsoft.com/office/mac/drawingml/2011/main" xmlns:a14="http://schemas.microsoft.com/office/drawing/2010/main" xmlns:m="http://schemas.openxmlformats.org/officeDocument/2006/math" xmlns="" val="1"/>
+              <ma14:wrappingTextBoxFlag xmlns="" xmlns:m="http://schemas.openxmlformats.org/officeDocument/2006/math" xmlns:a14="http://schemas.microsoft.com/office/drawing/2010/main" xmlns:ma14="http://schemas.microsoft.com/office/mac/drawingml/2011/main" val="1"/>
             </a:ext>
           </a:extLst>
         </p:spPr>
@@ -1586,7 +1586,7 @@
           </a:ln>
           <a:extLst>
             <a:ext uri="{C572A759-6A51-4108-AA02-DFA0A04FC94B}">
-              <ma14:wrappingTextBoxFlag xmlns:ma14="http://schemas.microsoft.com/office/mac/drawingml/2011/main" xmlns:a14="http://schemas.microsoft.com/office/drawing/2010/main" xmlns:m="http://schemas.openxmlformats.org/officeDocument/2006/math" xmlns="" val="1"/>
+              <ma14:wrappingTextBoxFlag xmlns="" xmlns:m="http://schemas.openxmlformats.org/officeDocument/2006/math" xmlns:a14="http://schemas.microsoft.com/office/drawing/2010/main" xmlns:ma14="http://schemas.microsoft.com/office/mac/drawingml/2011/main" val="1"/>
             </a:ext>
           </a:extLst>
         </p:spPr>
@@ -1638,7 +1638,7 @@
           </a:ln>
           <a:extLst>
             <a:ext uri="{C572A759-6A51-4108-AA02-DFA0A04FC94B}">
-              <ma14:wrappingTextBoxFlag xmlns:ma14="http://schemas.microsoft.com/office/mac/drawingml/2011/main" xmlns:a14="http://schemas.microsoft.com/office/drawing/2010/main" xmlns:m="http://schemas.openxmlformats.org/officeDocument/2006/math" xmlns="" val="1"/>
+              <ma14:wrappingTextBoxFlag xmlns="" xmlns:m="http://schemas.openxmlformats.org/officeDocument/2006/math" xmlns:a14="http://schemas.microsoft.com/office/drawing/2010/main" xmlns:ma14="http://schemas.microsoft.com/office/mac/drawingml/2011/main" val="1"/>
             </a:ext>
           </a:extLst>
         </p:spPr>
@@ -1742,7 +1742,7 @@
           </a:ln>
           <a:extLst>
             <a:ext uri="{C572A759-6A51-4108-AA02-DFA0A04FC94B}">
-              <ma14:wrappingTextBoxFlag xmlns:ma14="http://schemas.microsoft.com/office/mac/drawingml/2011/main" xmlns:a14="http://schemas.microsoft.com/office/drawing/2010/main" xmlns:m="http://schemas.openxmlformats.org/officeDocument/2006/math" xmlns="" val="1"/>
+              <ma14:wrappingTextBoxFlag xmlns="" xmlns:m="http://schemas.openxmlformats.org/officeDocument/2006/math" xmlns:a14="http://schemas.microsoft.com/office/drawing/2010/main" xmlns:ma14="http://schemas.microsoft.com/office/mac/drawingml/2011/main" val="1"/>
             </a:ext>
           </a:extLst>
         </p:spPr>
@@ -1917,7 +1917,7 @@
           </a:ln>
           <a:extLst>
             <a:ext uri="{C572A759-6A51-4108-AA02-DFA0A04FC94B}">
-              <ma14:wrappingTextBoxFlag xmlns:ma14="http://schemas.microsoft.com/office/mac/drawingml/2011/main" xmlns:a14="http://schemas.microsoft.com/office/drawing/2010/main" xmlns:m="http://schemas.openxmlformats.org/officeDocument/2006/math" xmlns="" val="1"/>
+              <ma14:wrappingTextBoxFlag xmlns="" xmlns:m="http://schemas.openxmlformats.org/officeDocument/2006/math" xmlns:a14="http://schemas.microsoft.com/office/drawing/2010/main" xmlns:ma14="http://schemas.microsoft.com/office/mac/drawingml/2011/main" val="1"/>
             </a:ext>
           </a:extLst>
         </p:spPr>
@@ -1963,7 +1963,7 @@
           </a:ln>
           <a:extLst>
             <a:ext uri="{C572A759-6A51-4108-AA02-DFA0A04FC94B}">
-              <ma14:wrappingTextBoxFlag xmlns:ma14="http://schemas.microsoft.com/office/mac/drawingml/2011/main" xmlns:a14="http://schemas.microsoft.com/office/drawing/2010/main" xmlns:m="http://schemas.openxmlformats.org/officeDocument/2006/math" xmlns="" val="1"/>
+              <ma14:wrappingTextBoxFlag xmlns="" xmlns:m="http://schemas.openxmlformats.org/officeDocument/2006/math" xmlns:a14="http://schemas.microsoft.com/office/drawing/2010/main" xmlns:ma14="http://schemas.microsoft.com/office/mac/drawingml/2011/main" val="1"/>
             </a:ext>
           </a:extLst>
         </p:spPr>
@@ -2009,7 +2009,7 @@
           </a:ln>
           <a:extLst>
             <a:ext uri="{C572A759-6A51-4108-AA02-DFA0A04FC94B}">
-              <ma14:wrappingTextBoxFlag xmlns:ma14="http://schemas.microsoft.com/office/mac/drawingml/2011/main" xmlns:a14="http://schemas.microsoft.com/office/drawing/2010/main" xmlns:m="http://schemas.openxmlformats.org/officeDocument/2006/math" xmlns="" val="1"/>
+              <ma14:wrappingTextBoxFlag xmlns="" xmlns:m="http://schemas.openxmlformats.org/officeDocument/2006/math" xmlns:a14="http://schemas.microsoft.com/office/drawing/2010/main" xmlns:ma14="http://schemas.microsoft.com/office/mac/drawingml/2011/main" val="1"/>
             </a:ext>
           </a:extLst>
         </p:spPr>
@@ -2070,7 +2070,7 @@
           </a:ln>
           <a:extLst>
             <a:ext uri="{C572A759-6A51-4108-AA02-DFA0A04FC94B}">
-              <ma14:wrappingTextBoxFlag xmlns:ma14="http://schemas.microsoft.com/office/mac/drawingml/2011/main" xmlns:a14="http://schemas.microsoft.com/office/drawing/2010/main" xmlns:m="http://schemas.openxmlformats.org/officeDocument/2006/math" xmlns="" val="1"/>
+              <ma14:wrappingTextBoxFlag xmlns="" xmlns:m="http://schemas.openxmlformats.org/officeDocument/2006/math" xmlns:a14="http://schemas.microsoft.com/office/drawing/2010/main" xmlns:ma14="http://schemas.microsoft.com/office/mac/drawingml/2011/main" val="1"/>
             </a:ext>
           </a:extLst>
         </p:spPr>
@@ -2116,7 +2116,7 @@
           </a:ln>
           <a:extLst>
             <a:ext uri="{C572A759-6A51-4108-AA02-DFA0A04FC94B}">
-              <ma14:wrappingTextBoxFlag xmlns:ma14="http://schemas.microsoft.com/office/mac/drawingml/2011/main" xmlns:a14="http://schemas.microsoft.com/office/drawing/2010/main" xmlns:m="http://schemas.openxmlformats.org/officeDocument/2006/math" xmlns="" val="1"/>
+              <ma14:wrappingTextBoxFlag xmlns="" xmlns:m="http://schemas.openxmlformats.org/officeDocument/2006/math" xmlns:a14="http://schemas.microsoft.com/office/drawing/2010/main" xmlns:ma14="http://schemas.microsoft.com/office/mac/drawingml/2011/main" val="1"/>
             </a:ext>
           </a:extLst>
         </p:spPr>
@@ -2168,7 +2168,7 @@
           </a:ln>
           <a:extLst>
             <a:ext uri="{C572A759-6A51-4108-AA02-DFA0A04FC94B}">
-              <ma14:wrappingTextBoxFlag xmlns:ma14="http://schemas.microsoft.com/office/mac/drawingml/2011/main" xmlns:a14="http://schemas.microsoft.com/office/drawing/2010/main" xmlns:m="http://schemas.openxmlformats.org/officeDocument/2006/math" xmlns="" val="1"/>
+              <ma14:wrappingTextBoxFlag xmlns="" xmlns:m="http://schemas.openxmlformats.org/officeDocument/2006/math" xmlns:a14="http://schemas.microsoft.com/office/drawing/2010/main" xmlns:ma14="http://schemas.microsoft.com/office/mac/drawingml/2011/main" val="1"/>
             </a:ext>
           </a:extLst>
         </p:spPr>
@@ -2213,7 +2213,7 @@
           </a:ln>
           <a:extLst>
             <a:ext uri="{C572A759-6A51-4108-AA02-DFA0A04FC94B}">
-              <ma14:wrappingTextBoxFlag xmlns:ma14="http://schemas.microsoft.com/office/mac/drawingml/2011/main" xmlns:a14="http://schemas.microsoft.com/office/drawing/2010/main" xmlns:m="http://schemas.openxmlformats.org/officeDocument/2006/math" xmlns="" val="1"/>
+              <ma14:wrappingTextBoxFlag xmlns="" xmlns:m="http://schemas.openxmlformats.org/officeDocument/2006/math" xmlns:a14="http://schemas.microsoft.com/office/drawing/2010/main" xmlns:ma14="http://schemas.microsoft.com/office/mac/drawingml/2011/main" val="1"/>
             </a:ext>
           </a:extLst>
         </p:spPr>
@@ -2223,7 +2223,7 @@
           </a:bodyPr>
           <a:lstStyle/>
           <a:p>
-            <a:pPr>
+            <a:pPr algn="just">
               <a:lnSpc>
                 <a:spcPct val="120000"/>
               </a:lnSpc>
@@ -2261,6 +2261,7 @@
             </a:r>
           </a:p>
           <a:p>
+            <a:pPr algn="just"/>
             <a:r>
               <a:rPr lang="en-IN" sz="1400" dirty="0">
                 <a:latin typeface="Arial"/>
@@ -2298,6 +2299,7 @@
             </a:r>
           </a:p>
           <a:p>
+            <a:pPr algn="just"/>
             <a:r>
               <a:rPr lang="en-IN" sz="1400" dirty="0">
                 <a:latin typeface="Arial"/>
@@ -2321,6 +2323,7 @@
             </a:r>
           </a:p>
           <a:p>
+            <a:pPr algn="just"/>
             <a:r>
               <a:rPr lang="en-IN" sz="1400" dirty="0">
                 <a:latin typeface="Arial"/>
@@ -2344,6 +2347,7 @@
             </a:r>
           </a:p>
           <a:p>
+            <a:pPr algn="just"/>
             <a:r>
               <a:rPr lang="en-IN" sz="1400" dirty="0">
                 <a:latin typeface="Arial"/>
@@ -2353,6 +2357,7 @@
             </a:r>
           </a:p>
           <a:p>
+            <a:pPr algn="just"/>
             <a:r>
               <a:rPr lang="en-IN" sz="1400" dirty="0">
                 <a:latin typeface="Arial"/>
@@ -2362,7 +2367,7 @@
             </a:r>
           </a:p>
           <a:p>
-            <a:pPr marL="342900" indent="-342900">
+            <a:pPr marL="342900" indent="-342900" algn="just">
               <a:lnSpc>
                 <a:spcPct val="120000"/>
               </a:lnSpc>
@@ -2403,7 +2408,7 @@
           </a:ln>
           <a:extLst>
             <a:ext uri="{C572A759-6A51-4108-AA02-DFA0A04FC94B}">
-              <ma14:wrappingTextBoxFlag xmlns:ma14="http://schemas.microsoft.com/office/mac/drawingml/2011/main" xmlns:a14="http://schemas.microsoft.com/office/drawing/2010/main" xmlns:m="http://schemas.openxmlformats.org/officeDocument/2006/math" xmlns="" val="1"/>
+              <ma14:wrappingTextBoxFlag xmlns="" xmlns:m="http://schemas.openxmlformats.org/officeDocument/2006/math" xmlns:a14="http://schemas.microsoft.com/office/drawing/2010/main" xmlns:ma14="http://schemas.microsoft.com/office/mac/drawingml/2011/main" val="1"/>
             </a:ext>
           </a:extLst>
         </p:spPr>
@@ -2429,13 +2434,16 @@
             </a:pPr>
             <a:r>
               <a:rPr lang="en-US" dirty="0"/>
-              <a:t>Harsh Mukesh Sharma, Shikha Shashikant </a:t>
+              <a:t>Shikha </a:t>
             </a:r>
             <a:r>
               <a:rPr lang="en-US" dirty="0" err="1"/>
               <a:t>Masurkar</a:t>
             </a:r>
-            <a:endParaRPr lang="en-US" dirty="0"/>
+            <a:r>
+              <a:rPr lang="en-US" dirty="0"/>
+              <a:t>, Harsh Mukesh Sharma</a:t>
+            </a:r>
           </a:p>
         </p:txBody>
       </p:sp>
@@ -2620,7 +2628,7 @@
           </a:ln>
           <a:extLst>
             <a:ext uri="{C572A759-6A51-4108-AA02-DFA0A04FC94B}">
-              <ma14:wrappingTextBoxFlag xmlns:ma14="http://schemas.microsoft.com/office/mac/drawingml/2011/main" xmlns:a14="http://schemas.microsoft.com/office/drawing/2010/main" xmlns:m="http://schemas.openxmlformats.org/officeDocument/2006/math" xmlns="" xmlns:lc="http://schemas.openxmlformats.org/drawingml/2006/lockedCanvas" val="1"/>
+              <ma14:wrappingTextBoxFlag xmlns:lc="http://schemas.openxmlformats.org/drawingml/2006/lockedCanvas" xmlns="" xmlns:m="http://schemas.openxmlformats.org/officeDocument/2006/math" xmlns:a14="http://schemas.microsoft.com/office/drawing/2010/main" xmlns:ma14="http://schemas.microsoft.com/office/mac/drawingml/2011/main" val="1"/>
             </a:ext>
           </a:extLst>
         </p:spPr>
@@ -2968,7 +2976,7 @@
           </a:ln>
           <a:extLst>
             <a:ext uri="{C572A759-6A51-4108-AA02-DFA0A04FC94B}">
-              <ma14:wrappingTextBoxFlag xmlns:ma14="http://schemas.microsoft.com/office/mac/drawingml/2011/main" xmlns:a14="http://schemas.microsoft.com/office/drawing/2010/main" xmlns:m="http://schemas.openxmlformats.org/officeDocument/2006/math" xmlns="" xmlns:lc="http://schemas.openxmlformats.org/drawingml/2006/lockedCanvas" val="1"/>
+              <ma14:wrappingTextBoxFlag xmlns:lc="http://schemas.openxmlformats.org/drawingml/2006/lockedCanvas" xmlns="" xmlns:m="http://schemas.openxmlformats.org/officeDocument/2006/math" xmlns:a14="http://schemas.microsoft.com/office/drawing/2010/main" xmlns:ma14="http://schemas.microsoft.com/office/mac/drawingml/2011/main" val="1"/>
             </a:ext>
           </a:extLst>
         </p:spPr>
@@ -3308,7 +3316,7 @@
           </a:ln>
           <a:extLst>
             <a:ext uri="{C572A759-6A51-4108-AA02-DFA0A04FC94B}">
-              <ma14:wrappingTextBoxFlag xmlns:ma14="http://schemas.microsoft.com/office/mac/drawingml/2011/main" xmlns:a14="http://schemas.microsoft.com/office/drawing/2010/main" xmlns:m="http://schemas.openxmlformats.org/officeDocument/2006/math" xmlns="" xmlns:lc="http://schemas.openxmlformats.org/drawingml/2006/lockedCanvas" val="1"/>
+              <ma14:wrappingTextBoxFlag xmlns:lc="http://schemas.openxmlformats.org/drawingml/2006/lockedCanvas" xmlns="" xmlns:m="http://schemas.openxmlformats.org/officeDocument/2006/math" xmlns:a14="http://schemas.microsoft.com/office/drawing/2010/main" xmlns:ma14="http://schemas.microsoft.com/office/mac/drawingml/2011/main" val="1"/>
             </a:ext>
           </a:extLst>
         </p:spPr>
@@ -3648,7 +3656,7 @@
           </a:ln>
           <a:extLst>
             <a:ext uri="{C572A759-6A51-4108-AA02-DFA0A04FC94B}">
-              <ma14:wrappingTextBoxFlag xmlns:ma14="http://schemas.microsoft.com/office/mac/drawingml/2011/main" xmlns:a14="http://schemas.microsoft.com/office/drawing/2010/main" xmlns:m="http://schemas.openxmlformats.org/officeDocument/2006/math" xmlns="" xmlns:lc="http://schemas.openxmlformats.org/drawingml/2006/lockedCanvas" val="1"/>
+              <ma14:wrappingTextBoxFlag xmlns:lc="http://schemas.openxmlformats.org/drawingml/2006/lockedCanvas" xmlns="" xmlns:m="http://schemas.openxmlformats.org/officeDocument/2006/math" xmlns:a14="http://schemas.microsoft.com/office/drawing/2010/main" xmlns:ma14="http://schemas.microsoft.com/office/mac/drawingml/2011/main" val="1"/>
             </a:ext>
           </a:extLst>
         </p:spPr>

--- a/ppt.pptx
+++ b/ppt.pptx
@@ -2509,36 +2509,6 @@
       </p:pic>
       <p:pic>
         <p:nvPicPr>
-          <p:cNvPr id="11" name="Picture 10">
-            <a:extLst>
-              <a:ext uri="{FF2B5EF4-FFF2-40B4-BE49-F238E27FC236}">
-                <a16:creationId xmlns:a16="http://schemas.microsoft.com/office/drawing/2014/main" id="{638A37B3-326D-9E68-C354-CB9611E79B06}"/>
-              </a:ext>
-            </a:extLst>
-          </p:cNvPr>
-          <p:cNvPicPr>
-            <a:picLocks noChangeAspect="1"/>
-          </p:cNvPicPr>
-          <p:nvPr/>
-        </p:nvPicPr>
-        <p:blipFill>
-          <a:blip r:embed="rId5"/>
-          <a:stretch>
-            <a:fillRect/>
-          </a:stretch>
-        </p:blipFill>
-        <p:spPr>
-          <a:xfrm>
-            <a:off x="11736498" y="17864564"/>
-            <a:ext cx="9288171" cy="2543530"/>
-          </a:xfrm>
-          <a:prstGeom prst="rect">
-            <a:avLst/>
-          </a:prstGeom>
-        </p:spPr>
-      </p:pic>
-      <p:pic>
-        <p:nvPicPr>
           <p:cNvPr id="13" name="Picture 12">
             <a:extLst>
               <a:ext uri="{FF2B5EF4-FFF2-40B4-BE49-F238E27FC236}">
@@ -2552,7 +2522,7 @@
           <p:nvPr/>
         </p:nvPicPr>
         <p:blipFill>
-          <a:blip r:embed="rId6"/>
+          <a:blip r:embed="rId5"/>
           <a:stretch>
             <a:fillRect/>
           </a:stretch>
@@ -2582,7 +2552,7 @@
           <p:nvPr/>
         </p:nvPicPr>
         <p:blipFill>
-          <a:blip r:embed="rId7">
+          <a:blip r:embed="rId6">
             <a:extLst>
               <a:ext uri="{28A0092B-C50C-407E-A947-70E740481C1C}">
                 <a14:useLocalDpi xmlns:a14="http://schemas.microsoft.com/office/drawing/2010/main" val="0"/>
@@ -3975,6 +3945,74 @@
           </a:p>
         </p:txBody>
       </p:sp>
+      <p:pic>
+        <p:nvPicPr>
+          <p:cNvPr id="8" name="Picture 7">
+            <a:extLst>
+              <a:ext uri="{FF2B5EF4-FFF2-40B4-BE49-F238E27FC236}">
+                <a16:creationId xmlns:a16="http://schemas.microsoft.com/office/drawing/2014/main" id="{32558B41-6DA5-4B0B-89CC-1ED7F4E3317A}"/>
+              </a:ext>
+            </a:extLst>
+          </p:cNvPr>
+          <p:cNvPicPr>
+            <a:picLocks noChangeAspect="1"/>
+          </p:cNvPicPr>
+          <p:nvPr/>
+        </p:nvPicPr>
+        <p:blipFill>
+          <a:blip r:embed="rId7"/>
+          <a:srcRect b="16909"/>
+          <a:stretch>
+            <a:fillRect/>
+          </a:stretch>
+        </p:blipFill>
+        <p:spPr>
+          <a:xfrm>
+            <a:off x="12871244" y="17775041"/>
+            <a:ext cx="7304556" cy="2627362"/>
+          </a:xfrm>
+          <a:prstGeom prst="rect">
+            <a:avLst/>
+          </a:prstGeom>
+        </p:spPr>
+      </p:pic>
+      <p:pic>
+        <p:nvPicPr>
+          <p:cNvPr id="10" name="Picture 9">
+            <a:extLst>
+              <a:ext uri="{FF2B5EF4-FFF2-40B4-BE49-F238E27FC236}">
+                <a16:creationId xmlns:a16="http://schemas.microsoft.com/office/drawing/2014/main" id="{23F91B60-A86E-7C64-DC9C-3C67DB8AE2E8}"/>
+              </a:ext>
+            </a:extLst>
+          </p:cNvPr>
+          <p:cNvPicPr>
+            <a:picLocks noChangeAspect="1"/>
+          </p:cNvPicPr>
+          <p:nvPr/>
+        </p:nvPicPr>
+        <p:blipFill>
+          <a:blip r:embed="rId8">
+            <a:extLst>
+              <a:ext uri="{28A0092B-C50C-407E-A947-70E740481C1C}">
+                <a14:useLocalDpi xmlns:a14="http://schemas.microsoft.com/office/drawing/2010/main" val="0"/>
+              </a:ext>
+            </a:extLst>
+          </a:blip>
+          <a:srcRect l="8289" t="25807" r="9078" b="24048"/>
+          <a:stretch>
+            <a:fillRect/>
+          </a:stretch>
+        </p:blipFill>
+        <p:spPr>
+          <a:xfrm>
+            <a:off x="29454680" y="18162287"/>
+            <a:ext cx="3284700" cy="3072239"/>
+          </a:xfrm>
+          <a:prstGeom prst="rect">
+            <a:avLst/>
+          </a:prstGeom>
+        </p:spPr>
+      </p:pic>
     </p:spTree>
   </p:cSld>
   <p:clrMapOvr>
